--- a/Jiyoon/데이터 분석 목차.pptx
+++ b/Jiyoon/데이터 분석 목차.pptx
@@ -7110,7 +7110,7 @@
           </a:lstStyle>
           <a:p>
             <a:fld id="{0A1EBAF3-FDE6-FC4D-8FF7-94F71BB5CE42}" type="datetimeFigureOut">
-              <a:t>2026-09-30</a:t>
+              <a:t>2026-10-01</a:t>
             </a:fld>
             <a:endParaRPr kumimoji="1" lang="ko-KR" altLang="en-US"/>
           </a:p>
@@ -11088,7 +11088,7 @@
               </a:spcAft>
             </a:pPr>
             <a:r>
-              <a:rPr sz="2200" b="1">
+              <a:rPr sz="2200" b="1" dirty="0">
                 <a:solidFill>
                   <a:srgbClr val="C8102E"/>
                 </a:solidFill>
@@ -11106,7 +11106,7 @@
               </a:spcAft>
             </a:pPr>
             <a:r>
-              <a:rPr sz="1300" b="1">
+              <a:rPr sz="1300" b="1" dirty="0" err="1">
                 <a:solidFill>
                   <a:srgbClr val="222222"/>
                 </a:solidFill>
@@ -11114,8 +11114,60 @@
                 <a:ea typeface="Pretendard"/>
                 <a:cs typeface="Pretendard"/>
               </a:rPr>
-              <a:t>데이터 수집 개요</a:t>
-            </a:r>
+              <a:t>데이터</a:t>
+            </a:r>
+            <a:r>
+              <a:rPr sz="1300" b="1" dirty="0">
+                <a:solidFill>
+                  <a:srgbClr val="222222"/>
+                </a:solidFill>
+                <a:latin typeface="Pretendard"/>
+                <a:ea typeface="Pretendard"/>
+                <a:cs typeface="Pretendard"/>
+              </a:rPr>
+              <a:t> </a:t>
+            </a:r>
+            <a:r>
+              <a:rPr sz="1300" b="1" dirty="0" err="1">
+                <a:solidFill>
+                  <a:srgbClr val="222222"/>
+                </a:solidFill>
+                <a:latin typeface="Pretendard"/>
+                <a:ea typeface="Pretendard"/>
+                <a:cs typeface="Pretendard"/>
+              </a:rPr>
+              <a:t>수집</a:t>
+            </a:r>
+            <a:r>
+              <a:rPr sz="1300" b="1" dirty="0">
+                <a:solidFill>
+                  <a:srgbClr val="222222"/>
+                </a:solidFill>
+                <a:latin typeface="Pretendard"/>
+                <a:ea typeface="Pretendard"/>
+                <a:cs typeface="Pretendard"/>
+              </a:rPr>
+              <a:t> </a:t>
+            </a:r>
+            <a:r>
+              <a:rPr sz="1300" b="1" dirty="0" err="1">
+                <a:solidFill>
+                  <a:srgbClr val="222222"/>
+                </a:solidFill>
+                <a:latin typeface="Pretendard"/>
+                <a:ea typeface="Pretendard"/>
+                <a:cs typeface="Pretendard"/>
+              </a:rPr>
+              <a:t>개요</a:t>
+            </a:r>
+            <a:endParaRPr sz="1300" b="1" dirty="0">
+              <a:solidFill>
+                <a:srgbClr val="222222"/>
+              </a:solidFill>
+              <a:latin typeface="Pretendard"/>
+              <a:ea typeface="Pretendard"/>
+              <a:cs typeface="Pretendard"/>
+            </a:endParaRPr>
           </a:p>
         </p:txBody>
       </p:sp>
@@ -11234,7 +11286,7 @@
               </a:spcAft>
             </a:pPr>
             <a:r>
-              <a:rPr sz="2200" b="1">
+              <a:rPr sz="2200" b="1" dirty="0">
                 <a:solidFill>
                   <a:srgbClr val="C8102E"/>
                 </a:solidFill>
@@ -11252,7 +11304,7 @@
               </a:spcAft>
             </a:pPr>
             <a:r>
-              <a:rPr sz="1300" b="1">
+              <a:rPr sz="1300" b="1" dirty="0" err="1">
                 <a:solidFill>
                   <a:srgbClr val="222222"/>
                 </a:solidFill>
@@ -11260,8 +11312,38 @@
                 <a:ea typeface="Pretendard"/>
                 <a:cs typeface="Pretendard"/>
               </a:rPr>
-              <a:t>데이터 전처리</a:t>
-            </a:r>
+              <a:t>데이터</a:t>
+            </a:r>
+            <a:r>
+              <a:rPr sz="1300" b="1" dirty="0">
+                <a:solidFill>
+                  <a:srgbClr val="222222"/>
+                </a:solidFill>
+                <a:latin typeface="Pretendard"/>
+                <a:ea typeface="Pretendard"/>
+                <a:cs typeface="Pretendard"/>
+              </a:rPr>
+              <a:t> </a:t>
+            </a:r>
+            <a:r>
+              <a:rPr sz="1300" b="1" dirty="0" err="1">
+                <a:solidFill>
+                  <a:srgbClr val="222222"/>
+                </a:solidFill>
+                <a:latin typeface="Pretendard"/>
+                <a:ea typeface="Pretendard"/>
+                <a:cs typeface="Pretendard"/>
+              </a:rPr>
+              <a:t>전처리</a:t>
+            </a:r>
+            <a:endParaRPr sz="1300" b="1" dirty="0">
+              <a:solidFill>
+                <a:srgbClr val="222222"/>
+              </a:solidFill>
+              <a:latin typeface="Pretendard"/>
+              <a:ea typeface="Pretendard"/>
+              <a:cs typeface="Pretendard"/>
+            </a:endParaRPr>
           </a:p>
         </p:txBody>
       </p:sp>
@@ -25225,7 +25307,7 @@
               </a:spcAft>
             </a:pPr>
             <a:r>
-              <a:rPr sz="2800" b="1">
+              <a:rPr sz="2800" b="1" dirty="0">
                 <a:solidFill>
                   <a:srgbClr val="222222"/>
                 </a:solidFill>
@@ -25243,7 +25325,7 @@
               </a:spcAft>
             </a:pPr>
             <a:r>
-              <a:rPr sz="1300" b="1">
+              <a:rPr sz="1300" b="1" dirty="0" err="1">
                 <a:solidFill>
                   <a:srgbClr val="222222"/>
                 </a:solidFill>
@@ -25251,8 +25333,60 @@
                 <a:ea typeface="Pretendard"/>
                 <a:cs typeface="Pretendard"/>
               </a:rPr>
-              <a:t>이송 건수 기록</a:t>
-            </a:r>
+              <a:t>이송</a:t>
+            </a:r>
+            <a:r>
+              <a:rPr sz="1300" b="1" dirty="0">
+                <a:solidFill>
+                  <a:srgbClr val="222222"/>
+                </a:solidFill>
+                <a:latin typeface="Pretendard"/>
+                <a:ea typeface="Pretendard"/>
+                <a:cs typeface="Pretendard"/>
+              </a:rPr>
+              <a:t> </a:t>
+            </a:r>
+            <a:r>
+              <a:rPr sz="1300" b="1" dirty="0" err="1">
+                <a:solidFill>
+                  <a:srgbClr val="222222"/>
+                </a:solidFill>
+                <a:latin typeface="Pretendard"/>
+                <a:ea typeface="Pretendard"/>
+                <a:cs typeface="Pretendard"/>
+              </a:rPr>
+              <a:t>건수</a:t>
+            </a:r>
+            <a:r>
+              <a:rPr sz="1300" b="1" dirty="0">
+                <a:solidFill>
+                  <a:srgbClr val="222222"/>
+                </a:solidFill>
+                <a:latin typeface="Pretendard"/>
+                <a:ea typeface="Pretendard"/>
+                <a:cs typeface="Pretendard"/>
+              </a:rPr>
+              <a:t> </a:t>
+            </a:r>
+            <a:r>
+              <a:rPr sz="1300" b="1" dirty="0" err="1">
+                <a:solidFill>
+                  <a:srgbClr val="222222"/>
+                </a:solidFill>
+                <a:latin typeface="Pretendard"/>
+                <a:ea typeface="Pretendard"/>
+                <a:cs typeface="Pretendard"/>
+              </a:rPr>
+              <a:t>기록</a:t>
+            </a:r>
+            <a:endParaRPr sz="1300" b="1" dirty="0">
+              <a:solidFill>
+                <a:srgbClr val="222222"/>
+              </a:solidFill>
+              <a:latin typeface="Pretendard"/>
+              <a:ea typeface="Pretendard"/>
+              <a:cs typeface="Pretendard"/>
+            </a:endParaRPr>
           </a:p>
           <a:p>
             <a:pPr algn="l">
@@ -25261,7 +25395,7 @@
               </a:spcAft>
             </a:pPr>
             <a:r>
-              <a:rPr sz="1100" b="0">
+              <a:rPr sz="1100" b="0" dirty="0">
                 <a:solidFill>
                   <a:srgbClr val="45515E"/>
                 </a:solidFill>
@@ -25269,8 +25403,27 @@
                 <a:ea typeface="Pretendard"/>
                 <a:cs typeface="Pretendard"/>
               </a:rPr>
-              <a:t>2017.01 ~ 2025.12, 월 단위</a:t>
-            </a:r>
+              <a:t>2017.01 ~ 2025.12, 월 </a:t>
+            </a:r>
+            <a:r>
+              <a:rPr sz="1100" b="0" dirty="0" err="1">
+                <a:solidFill>
+                  <a:srgbClr val="45515E"/>
+                </a:solidFill>
+                <a:latin typeface="Pretendard"/>
+                <a:ea typeface="Pretendard"/>
+                <a:cs typeface="Pretendard"/>
+              </a:rPr>
+              <a:t>단위</a:t>
+            </a:r>
+            <a:endParaRPr sz="1100" b="0" dirty="0">
+              <a:solidFill>
+                <a:srgbClr val="45515E"/>
+              </a:solidFill>
+              <a:latin typeface="Pretendard"/>
+              <a:ea typeface="Pretendard"/>
+              <a:cs typeface="Pretendard"/>
+            </a:endParaRPr>
           </a:p>
         </p:txBody>
       </p:sp>
@@ -25348,7 +25501,7 @@
               </a:spcAft>
             </a:pPr>
             <a:r>
-              <a:rPr sz="2800" b="1">
+              <a:rPr sz="2800" b="1" dirty="0">
                 <a:solidFill>
                   <a:srgbClr val="222222"/>
                 </a:solidFill>
@@ -25366,7 +25519,7 @@
               </a:spcAft>
             </a:pPr>
             <a:r>
-              <a:rPr sz="1300" b="1">
+              <a:rPr sz="1300" b="1" dirty="0" err="1">
                 <a:solidFill>
                   <a:srgbClr val="222222"/>
                 </a:solidFill>
@@ -25374,8 +25527,38 @@
                 <a:ea typeface="Pretendard"/>
                 <a:cs typeface="Pretendard"/>
               </a:rPr>
-              <a:t>분석 단위</a:t>
-            </a:r>
+              <a:t>분석</a:t>
+            </a:r>
+            <a:r>
+              <a:rPr sz="1300" b="1" dirty="0">
+                <a:solidFill>
+                  <a:srgbClr val="222222"/>
+                </a:solidFill>
+                <a:latin typeface="Pretendard"/>
+                <a:ea typeface="Pretendard"/>
+                <a:cs typeface="Pretendard"/>
+              </a:rPr>
+              <a:t> </a:t>
+            </a:r>
+            <a:r>
+              <a:rPr sz="1300" b="1" dirty="0" err="1">
+                <a:solidFill>
+                  <a:srgbClr val="222222"/>
+                </a:solidFill>
+                <a:latin typeface="Pretendard"/>
+                <a:ea typeface="Pretendard"/>
+                <a:cs typeface="Pretendard"/>
+              </a:rPr>
+              <a:t>단위</a:t>
+            </a:r>
+            <a:endParaRPr sz="1300" b="1" dirty="0">
+              <a:solidFill>
+                <a:srgbClr val="222222"/>
+              </a:solidFill>
+              <a:latin typeface="Pretendard"/>
+              <a:ea typeface="Pretendard"/>
+              <a:cs typeface="Pretendard"/>
+            </a:endParaRPr>
           </a:p>
           <a:p>
             <a:pPr algn="l">
@@ -25384,7 +25567,7 @@
               </a:spcAft>
             </a:pPr>
             <a:r>
-              <a:rPr sz="1100" b="0">
+              <a:rPr sz="1100" b="0" dirty="0" err="1">
                 <a:solidFill>
                   <a:srgbClr val="45515E"/>
                 </a:solidFill>
@@ -25392,7 +25575,62 @@
                 <a:ea typeface="Pretendard"/>
                 <a:cs typeface="Pretendard"/>
               </a:rPr>
-              <a:t>서울 전체 자치구, 구 × 월 / 구 × 일</a:t>
+              <a:t>서울</a:t>
+            </a:r>
+            <a:r>
+              <a:rPr sz="1100" b="0" dirty="0">
+                <a:solidFill>
+                  <a:srgbClr val="45515E"/>
+                </a:solidFill>
+                <a:latin typeface="Pretendard"/>
+                <a:ea typeface="Pretendard"/>
+                <a:cs typeface="Pretendard"/>
+              </a:rPr>
+              <a:t> </a:t>
+            </a:r>
+            <a:r>
+              <a:rPr sz="1100" b="0" dirty="0" err="1">
+                <a:solidFill>
+                  <a:srgbClr val="45515E"/>
+                </a:solidFill>
+                <a:latin typeface="Pretendard"/>
+                <a:ea typeface="Pretendard"/>
+                <a:cs typeface="Pretendard"/>
+              </a:rPr>
+              <a:t>전체</a:t>
+            </a:r>
+            <a:r>
+              <a:rPr sz="1100" b="0" dirty="0">
+                <a:solidFill>
+                  <a:srgbClr val="45515E"/>
+                </a:solidFill>
+                <a:latin typeface="Pretendard"/>
+                <a:ea typeface="Pretendard"/>
+                <a:cs typeface="Pretendard"/>
+              </a:rPr>
+              <a:t> </a:t>
+            </a:r>
+            <a:r>
+              <a:rPr sz="1100" b="0" dirty="0" err="1">
+                <a:solidFill>
+                  <a:srgbClr val="45515E"/>
+                </a:solidFill>
+                <a:latin typeface="Pretendard"/>
+                <a:ea typeface="Pretendard"/>
+                <a:cs typeface="Pretendard"/>
+              </a:rPr>
+              <a:t>자치구</a:t>
+            </a:r>
+            <a:r>
+              <a:rPr sz="1100" b="0" dirty="0">
+                <a:solidFill>
+                  <a:srgbClr val="45515E"/>
+                </a:solidFill>
+                <a:latin typeface="Pretendard"/>
+                <a:ea typeface="Pretendard"/>
+                <a:cs typeface="Pretendard"/>
+              </a:rPr>
+              <a:t>, 구 × 월 / 구 × 일</a:t>
             </a:r>
           </a:p>
         </p:txBody>
@@ -25591,7 +25829,7 @@
                         </a:lnSpc>
                       </a:pPr>
                       <a:r>
-                        <a:rPr lang="zh-CN" sz="1150" b="1" u="none" strike="noStrike">
+                        <a:rPr lang="zh-CN" sz="1150" b="1" u="none" strike="noStrike" dirty="0">
                           <a:solidFill>
                             <a:srgbClr val="45515E"/>
                           </a:solidFill>
@@ -25603,7 +25841,7 @@
                         <a:t>기간 </a:t>
                       </a:r>
                       <a:r>
-                        <a:rPr lang="en-US" sz="1150" b="1" u="none" strike="noStrike">
+                        <a:rPr lang="en-US" sz="1150" b="1" u="none" strike="noStrike" dirty="0">
                           <a:solidFill>
                             <a:srgbClr val="45515E"/>
                           </a:solidFill>
@@ -25615,7 +25853,7 @@
                         <a:t>· </a:t>
                       </a:r>
                       <a:r>
-                        <a:rPr lang="zh-CN" sz="1150" b="1" u="none" strike="noStrike">
+                        <a:rPr lang="zh-CN" sz="1150" b="1" u="none" strike="noStrike" dirty="0">
                           <a:solidFill>
                             <a:srgbClr val="45515E"/>
                           </a:solidFill>
@@ -25626,7 +25864,7 @@
                         </a:rPr>
                         <a:t>단위</a:t>
                       </a:r>
-                      <a:endParaRPr lang="en-US" sz="1150" b="0" u="none" strike="noStrike">
+                      <a:endParaRPr lang="en-US" sz="1150" b="0" u="none" strike="noStrike" dirty="0">
                         <a:solidFill>
                           <a:srgbClr val="000000"/>
                         </a:solidFill>
@@ -25875,7 +26113,7 @@
                         </a:lnSpc>
                       </a:pPr>
                       <a:r>
-                        <a:rPr lang="en-US" sz="1200" b="0" u="none" strike="noStrike">
+                        <a:rPr lang="en-US" sz="1200" b="0" u="none" strike="noStrike" dirty="0">
                           <a:solidFill>
                             <a:srgbClr val="222222"/>
                           </a:solidFill>
@@ -25887,7 +26125,7 @@
                         <a:t>2017.01~2025.12 · </a:t>
                       </a:r>
                       <a:r>
-                        <a:rPr lang="zh-CN" sz="1200" b="0" u="none" strike="noStrike">
+                        <a:rPr lang="zh-CN" sz="1200" b="0" u="none" strike="noStrike" dirty="0">
                           <a:solidFill>
                             <a:srgbClr val="222222"/>
                           </a:solidFill>
@@ -25899,7 +26137,7 @@
                         <a:t>구 </a:t>
                       </a:r>
                       <a:r>
-                        <a:rPr lang="en-US" sz="1200" b="0" u="none" strike="noStrike">
+                        <a:rPr lang="en-US" sz="1200" b="0" u="none" strike="noStrike" dirty="0">
                           <a:solidFill>
                             <a:srgbClr val="222222"/>
                           </a:solidFill>
@@ -25911,7 +26149,7 @@
                         <a:t>× </a:t>
                       </a:r>
                       <a:r>
-                        <a:rPr lang="zh-CN" sz="1200" b="0" u="none" strike="noStrike">
+                        <a:rPr lang="zh-CN" sz="1200" b="0" u="none" strike="noStrike" dirty="0">
                           <a:solidFill>
                             <a:srgbClr val="222222"/>
                           </a:solidFill>
@@ -25922,7 +26160,7 @@
                         </a:rPr>
                         <a:t>월</a:t>
                       </a:r>
-                      <a:endParaRPr lang="en-US" sz="1200" b="0" u="none" strike="noStrike">
+                      <a:endParaRPr lang="en-US" sz="1200" b="0" u="none" strike="noStrike" dirty="0">
                         <a:solidFill>
                           <a:srgbClr val="000000"/>
                         </a:solidFill>
@@ -26241,7 +26479,7 @@
                         </a:lnSpc>
                       </a:pPr>
                       <a:r>
-                        <a:rPr lang="en-US" sz="1200" b="0" u="none" strike="noStrike">
+                        <a:rPr lang="en-US" sz="1200" b="0" u="none" strike="noStrike" dirty="0">
                           <a:solidFill>
                             <a:srgbClr val="222222"/>
                           </a:solidFill>
@@ -26253,7 +26491,7 @@
                         <a:t>2018.04~2026.07 · </a:t>
                       </a:r>
                       <a:r>
-                        <a:rPr lang="zh-CN" sz="1200" b="0" u="none" strike="noStrike">
+                        <a:rPr lang="zh-CN" sz="1200" b="0" u="none" strike="noStrike" dirty="0">
                           <a:solidFill>
                             <a:srgbClr val="222222"/>
                           </a:solidFill>
@@ -26265,7 +26503,7 @@
                         <a:t>구 </a:t>
                       </a:r>
                       <a:r>
-                        <a:rPr lang="en-US" sz="1200" b="0" u="none" strike="noStrike">
+                        <a:rPr lang="en-US" sz="1200" b="0" u="none" strike="noStrike" dirty="0">
                           <a:solidFill>
                             <a:srgbClr val="222222"/>
                           </a:solidFill>
@@ -26277,7 +26515,7 @@
                         <a:t>× </a:t>
                       </a:r>
                       <a:r>
-                        <a:rPr lang="zh-CN" sz="1200" b="0" u="none" strike="noStrike">
+                        <a:rPr lang="zh-CN" sz="1200" b="0" u="none" strike="noStrike" dirty="0">
                           <a:solidFill>
                             <a:srgbClr val="222222"/>
                           </a:solidFill>
@@ -26288,7 +26526,7 @@
                         </a:rPr>
                         <a:t>일</a:t>
                       </a:r>
-                      <a:endParaRPr lang="en-US" sz="1200" b="0" u="none" strike="noStrike">
+                      <a:endParaRPr lang="en-US" sz="1200" b="0" u="none" strike="noStrike" dirty="0">
                         <a:solidFill>
                           <a:srgbClr val="000000"/>
                         </a:solidFill>
@@ -26889,7 +27127,7 @@
                         </a:lnSpc>
                       </a:pPr>
                       <a:r>
-                        <a:rPr lang="en-US" sz="1200" b="0" u="none" strike="noStrike">
+                        <a:rPr lang="en-US" sz="1200" b="0" u="none" strike="noStrike" dirty="0">
                           <a:solidFill>
                             <a:srgbClr val="222222"/>
                           </a:solidFill>
@@ -26901,7 +27139,7 @@
                         <a:t>2019~2024 · </a:t>
                       </a:r>
                       <a:r>
-                        <a:rPr lang="zh-CN" sz="1200" b="0" u="none" strike="noStrike">
+                        <a:rPr lang="zh-CN" sz="1200" b="0" u="none" strike="noStrike" dirty="0">
                           <a:solidFill>
                             <a:srgbClr val="222222"/>
                           </a:solidFill>
@@ -26913,7 +27151,7 @@
                         <a:t>구 </a:t>
                       </a:r>
                       <a:r>
-                        <a:rPr lang="en-US" sz="1200" b="0" u="none" strike="noStrike">
+                        <a:rPr lang="en-US" sz="1200" b="0" u="none" strike="noStrike" dirty="0">
                           <a:solidFill>
                             <a:srgbClr val="222222"/>
                           </a:solidFill>
@@ -26925,7 +27163,7 @@
                         <a:t>× </a:t>
                       </a:r>
                       <a:r>
-                        <a:rPr lang="zh-CN" sz="1200" b="0" u="none" strike="noStrike">
+                        <a:rPr lang="zh-CN" sz="1200" b="0" u="none" strike="noStrike" dirty="0">
                           <a:solidFill>
                             <a:srgbClr val="222222"/>
                           </a:solidFill>
@@ -26936,7 +27174,7 @@
                         </a:rPr>
                         <a:t>연</a:t>
                       </a:r>
-                      <a:endParaRPr lang="en-US" sz="1200" b="0" u="none" strike="noStrike">
+                      <a:endParaRPr lang="en-US" sz="1200" b="0" u="none" strike="noStrike" dirty="0">
                         <a:solidFill>
                           <a:srgbClr val="000000"/>
                         </a:solidFill>
@@ -28466,7 +28704,7 @@
               </a:spcAft>
             </a:pPr>
             <a:r>
-              <a:rPr sz="3000" b="1">
+              <a:rPr sz="3000" b="1" dirty="0">
                 <a:solidFill>
                   <a:srgbClr val="222222"/>
                 </a:solidFill>
@@ -28474,8 +28712,71 @@
                 <a:ea typeface="Pretendard"/>
                 <a:cs typeface="Pretendard"/>
               </a:rPr>
-              <a:t>6. 키워드 · 트렌드 분석</a:t>
-            </a:r>
+              <a:t>6. </a:t>
+            </a:r>
+            <a:r>
+              <a:rPr sz="3000" b="1" dirty="0" err="1">
+                <a:solidFill>
+                  <a:srgbClr val="222222"/>
+                </a:solidFill>
+                <a:latin typeface="Pretendard"/>
+                <a:ea typeface="Pretendard"/>
+                <a:cs typeface="Pretendard"/>
+              </a:rPr>
+              <a:t>키워드</a:t>
+            </a:r>
+            <a:r>
+              <a:rPr sz="3000" b="1" dirty="0">
+                <a:solidFill>
+                  <a:srgbClr val="222222"/>
+                </a:solidFill>
+                <a:latin typeface="Pretendard"/>
+                <a:ea typeface="Pretendard"/>
+                <a:cs typeface="Pretendard"/>
+              </a:rPr>
+              <a:t> · </a:t>
+            </a:r>
+            <a:r>
+              <a:rPr sz="3000" b="1" dirty="0" err="1">
+                <a:solidFill>
+                  <a:srgbClr val="222222"/>
+                </a:solidFill>
+                <a:latin typeface="Pretendard"/>
+                <a:ea typeface="Pretendard"/>
+                <a:cs typeface="Pretendard"/>
+              </a:rPr>
+              <a:t>트렌드</a:t>
+            </a:r>
+            <a:r>
+              <a:rPr sz="3000" b="1" dirty="0">
+                <a:solidFill>
+                  <a:srgbClr val="222222"/>
+                </a:solidFill>
+                <a:latin typeface="Pretendard"/>
+                <a:ea typeface="Pretendard"/>
+                <a:cs typeface="Pretendard"/>
+              </a:rPr>
+              <a:t> </a:t>
+            </a:r>
+            <a:r>
+              <a:rPr sz="3000" b="1" dirty="0" err="1">
+                <a:solidFill>
+                  <a:srgbClr val="222222"/>
+                </a:solidFill>
+                <a:latin typeface="Pretendard"/>
+                <a:ea typeface="Pretendard"/>
+                <a:cs typeface="Pretendard"/>
+              </a:rPr>
+              <a:t>분석</a:t>
+            </a:r>
+            <a:endParaRPr sz="3000" b="1" dirty="0">
+              <a:solidFill>
+                <a:srgbClr val="222222"/>
+              </a:solidFill>
+              <a:latin typeface="Pretendard"/>
+              <a:ea typeface="Pretendard"/>
+              <a:cs typeface="Pretendard"/>
+            </a:endParaRPr>
           </a:p>
         </p:txBody>
       </p:sp>
@@ -32213,7 +32514,7 @@
                         </a:lnSpc>
                       </a:pPr>
                       <a:r>
-                        <a:rPr lang="zh-CN" sz="1100" b="0" u="none" strike="noStrike">
+                        <a:rPr lang="zh-CN" sz="1100" b="0" u="none" strike="noStrike" dirty="0">
                           <a:solidFill>
                             <a:srgbClr val="222222"/>
                           </a:solidFill>
@@ -32225,7 +32526,7 @@
                         <a:t>병상</a:t>
                       </a:r>
                       <a:r>
-                        <a:rPr lang="en-US" sz="1100" b="0" u="none" strike="noStrike">
+                        <a:rPr lang="en-US" sz="1100" b="0" u="none" strike="noStrike" dirty="0">
                           <a:solidFill>
                             <a:srgbClr val="222222"/>
                           </a:solidFill>
@@ -32237,7 +32538,7 @@
                         <a:t>: </a:t>
                       </a:r>
                       <a:r>
-                        <a:rPr lang="zh-CN" sz="1100" b="0" u="none" strike="noStrike">
+                        <a:rPr lang="zh-CN" sz="1100" b="0" u="none" strike="noStrike" dirty="0">
                           <a:solidFill>
                             <a:srgbClr val="222222"/>
                           </a:solidFill>
@@ -32249,7 +32550,7 @@
                         <a:t>웹 현황 </a:t>
                       </a:r>
                       <a:r>
-                        <a:rPr lang="en-US" sz="1100" b="0" u="none" strike="noStrike">
+                        <a:rPr lang="en-US" sz="1100" b="0" u="none" strike="noStrike" dirty="0">
                           <a:solidFill>
                             <a:srgbClr val="222222"/>
                           </a:solidFill>
@@ -32261,7 +32562,7 @@
                         <a:t>/ </a:t>
                       </a:r>
                       <a:r>
-                        <a:rPr lang="zh-CN" sz="1100" b="0" u="none" strike="noStrike">
+                        <a:rPr lang="zh-CN" sz="1100" b="0" u="none" strike="noStrike" dirty="0">
                           <a:solidFill>
                             <a:srgbClr val="222222"/>
                           </a:solidFill>
@@ -32273,7 +32574,7 @@
                         <a:t>표본</a:t>
                       </a:r>
                       <a:r>
-                        <a:rPr lang="en-US" sz="1100" b="0" u="none" strike="noStrike">
+                        <a:rPr lang="en-US" sz="1100" b="0" u="none" strike="noStrike" dirty="0">
                           <a:solidFill>
                             <a:srgbClr val="222222"/>
                           </a:solidFill>
@@ -32285,7 +32586,7 @@
                         <a:t>: </a:t>
                       </a:r>
                       <a:r>
-                        <a:rPr lang="zh-CN" sz="1100" b="0" u="none" strike="noStrike">
+                        <a:rPr lang="zh-CN" sz="1100" b="0" u="none" strike="noStrike" dirty="0">
                           <a:solidFill>
                             <a:srgbClr val="222222"/>
                           </a:solidFill>
@@ -32296,7 +32597,7 @@
                         </a:rPr>
                         <a:t>빈도 분석</a:t>
                       </a:r>
-                      <a:endParaRPr lang="en-US" sz="1100" b="0" u="none" strike="noStrike">
+                      <a:endParaRPr lang="en-US" sz="1100" b="0" u="none" strike="noStrike" dirty="0">
                         <a:solidFill>
                           <a:srgbClr val="000000"/>
                         </a:solidFill>
@@ -32357,7 +32658,7 @@
     <mc:Choice Requires="p14">
       <p:transition spd="slow" p14:dur="2000"/>
     </mc:Choice>
-    <mc:Fallback xmlns="" xmlns:p15="http://schemas.microsoft.com/office/powerpoint/2012/main">
+    <mc:Fallback xmlns:p15="http://schemas.microsoft.com/office/powerpoint/2012/main" xmlns="">
       <p:transition spd="slow"/>
     </mc:Fallback>
   </mc:AlternateContent>
@@ -35004,7 +35305,7 @@
                     <a:lstStyle/>
                     <a:p>
                       <a:r>
-                        <a:rPr sz="1200" b="0">
+                        <a:rPr sz="1200" b="0" dirty="0" err="1">
                           <a:solidFill>
                             <a:srgbClr val="222222"/>
                           </a:solidFill>
@@ -35012,8 +35313,126 @@
                           <a:ea typeface="Pretendard"/>
                           <a:cs typeface="Pretendard"/>
                         </a:rPr>
-                        <a:t>예측 결과와 나란히 보여주는 보조 지표</a:t>
-                      </a:r>
+                        <a:t>예측</a:t>
+                      </a:r>
+                      <a:r>
+                        <a:rPr sz="1200" b="0" dirty="0">
+                          <a:solidFill>
+                            <a:srgbClr val="222222"/>
+                          </a:solidFill>
+                          <a:latin typeface="Pretendard"/>
+                          <a:ea typeface="Pretendard"/>
+                          <a:cs typeface="Pretendard"/>
+                        </a:rPr>
+                        <a:t> </a:t>
+                      </a:r>
+                      <a:r>
+                        <a:rPr sz="1200" b="0" dirty="0" err="1">
+                          <a:solidFill>
+                            <a:srgbClr val="222222"/>
+                          </a:solidFill>
+                          <a:latin typeface="Pretendard"/>
+                          <a:ea typeface="Pretendard"/>
+                          <a:cs typeface="Pretendard"/>
+                        </a:rPr>
+                        <a:t>결과와</a:t>
+                      </a:r>
+                      <a:r>
+                        <a:rPr sz="1200" b="0" dirty="0">
+                          <a:solidFill>
+                            <a:srgbClr val="222222"/>
+                          </a:solidFill>
+                          <a:latin typeface="Pretendard"/>
+                          <a:ea typeface="Pretendard"/>
+                          <a:cs typeface="Pretendard"/>
+                        </a:rPr>
+                        <a:t> </a:t>
+                      </a:r>
+                      <a:r>
+                        <a:rPr sz="1200" b="0" dirty="0" err="1">
+                          <a:solidFill>
+                            <a:srgbClr val="222222"/>
+                          </a:solidFill>
+                          <a:latin typeface="Pretendard"/>
+                          <a:ea typeface="Pretendard"/>
+                          <a:cs typeface="Pretendard"/>
+                        </a:rPr>
+                        <a:t>나란히</a:t>
+                      </a:r>
+                      <a:r>
+                        <a:rPr sz="1200" b="0" dirty="0">
+                          <a:solidFill>
+                            <a:srgbClr val="222222"/>
+                          </a:solidFill>
+                          <a:latin typeface="Pretendard"/>
+                          <a:ea typeface="Pretendard"/>
+                          <a:cs typeface="Pretendard"/>
+                        </a:rPr>
+                        <a:t> </a:t>
+                      </a:r>
+                      <a:r>
+                        <a:rPr sz="1200" b="0" dirty="0" err="1">
+                          <a:solidFill>
+                            <a:srgbClr val="222222"/>
+                          </a:solidFill>
+                          <a:latin typeface="Pretendard"/>
+                          <a:ea typeface="Pretendard"/>
+                          <a:cs typeface="Pretendard"/>
+                        </a:rPr>
+                        <a:t>보여주는</a:t>
+                      </a:r>
+                      <a:r>
+                        <a:rPr sz="1200" b="0" dirty="0">
+                          <a:solidFill>
+                            <a:srgbClr val="222222"/>
+                          </a:solidFill>
+                          <a:latin typeface="Pretendard"/>
+                          <a:ea typeface="Pretendard"/>
+                          <a:cs typeface="Pretendard"/>
+                        </a:rPr>
+                        <a:t> </a:t>
+                      </a:r>
+                      <a:r>
+                        <a:rPr sz="1200" b="0" dirty="0" err="1">
+                          <a:solidFill>
+                            <a:srgbClr val="222222"/>
+                          </a:solidFill>
+                          <a:latin typeface="Pretendard"/>
+                          <a:ea typeface="Pretendard"/>
+                          <a:cs typeface="Pretendard"/>
+                        </a:rPr>
+                        <a:t>보조</a:t>
+                      </a:r>
+                      <a:r>
+                        <a:rPr sz="1200" b="0" dirty="0">
+                          <a:solidFill>
+                            <a:srgbClr val="222222"/>
+                          </a:solidFill>
+                          <a:latin typeface="Pretendard"/>
+                          <a:ea typeface="Pretendard"/>
+                          <a:cs typeface="Pretendard"/>
+                        </a:rPr>
+                        <a:t> </a:t>
+                      </a:r>
+                      <a:r>
+                        <a:rPr sz="1200" b="0" dirty="0" err="1">
+                          <a:solidFill>
+                            <a:srgbClr val="222222"/>
+                          </a:solidFill>
+                          <a:latin typeface="Pretendard"/>
+                          <a:ea typeface="Pretendard"/>
+                          <a:cs typeface="Pretendard"/>
+                        </a:rPr>
+                        <a:t>지표</a:t>
+                      </a:r>
+                      <a:endParaRPr sz="1200" b="0" dirty="0">
+                        <a:solidFill>
+                          <a:srgbClr val="222222"/>
+                        </a:solidFill>
+                        <a:latin typeface="Pretendard"/>
+                        <a:ea typeface="Pretendard"/>
+                        <a:cs typeface="Pretendard"/>
+                      </a:endParaRPr>
                     </a:p>
                   </a:txBody>
                   <a:tcPr marL="60000" marR="60000" marT="30000" marB="30000" anchor="ctr">
@@ -38930,7 +39349,7 @@
                         </a:lnSpc>
                       </a:pPr>
                       <a:r>
-                        <a:rPr lang="zh-CN" sz="1150" b="1" u="none" strike="noStrike">
+                        <a:rPr lang="zh-CN" sz="1150" b="1" u="none" strike="noStrike" dirty="0">
                           <a:solidFill>
                             <a:srgbClr val="222222"/>
                           </a:solidFill>
@@ -38941,7 +39360,7 @@
                         </a:rPr>
                         <a:t>헤더 정리</a:t>
                       </a:r>
-                      <a:endParaRPr lang="en-US" sz="1150" b="0" u="none" strike="noStrike">
+                      <a:endParaRPr lang="en-US" sz="1150" b="0" u="none" strike="noStrike" dirty="0">
                         <a:solidFill>
                           <a:srgbClr val="000000"/>
                         </a:solidFill>
@@ -39027,14 +39446,6 @@
                         </a:rPr>
                         <a:t>옆으로 펼쳐진 월 컬럼을 세로로</a:t>
                       </a:r>
-                      <a:endParaRPr lang="ko-KR" altLang="en-US" sz="1200" b="0" dirty="0" smtClean="0">
-                        <a:solidFill>
-                          <a:srgbClr val="222222"/>
-                        </a:solidFill>
-                        <a:latin typeface="Pretendard"/>
-                        <a:ea typeface="Pretendard"/>
-                        <a:cs typeface="Pretendard"/>
-                      </a:endParaRPr>
                     </a:p>
                   </a:txBody>
                   <a:tcPr marL="59760" marR="59760" anchor="ctr">
@@ -39206,7 +39617,7 @@
                         </a:lnSpc>
                       </a:pPr>
                       <a:r>
-                        <a:rPr lang="zh-CN" sz="1150" b="0" u="none" strike="noStrike">
+                        <a:rPr lang="zh-CN" sz="1150" b="0" u="none" strike="noStrike" dirty="0">
                           <a:solidFill>
                             <a:srgbClr val="222222"/>
                           </a:solidFill>
@@ -39218,7 +39629,7 @@
                         <a:t>구분</a:t>
                       </a:r>
                       <a:r>
-                        <a:rPr lang="en-US" sz="1150" b="0" u="none" strike="noStrike">
+                        <a:rPr lang="en-US" sz="1150" b="0" u="none" strike="noStrike" dirty="0">
                           <a:solidFill>
                             <a:srgbClr val="222222"/>
                           </a:solidFill>
@@ -39230,7 +39641,7 @@
                         <a:t>, 1</a:t>
                       </a:r>
                       <a:r>
-                        <a:rPr lang="zh-CN" sz="1150" b="0" u="none" strike="noStrike">
+                        <a:rPr lang="zh-CN" sz="1150" b="0" u="none" strike="noStrike" dirty="0">
                           <a:solidFill>
                             <a:srgbClr val="222222"/>
                           </a:solidFill>
@@ -39242,7 +39653,7 @@
                         <a:t>월 … </a:t>
                       </a:r>
                       <a:r>
-                        <a:rPr lang="en-US" sz="1150" b="0" u="none" strike="noStrike">
+                        <a:rPr lang="en-US" sz="1150" b="0" u="none" strike="noStrike" dirty="0">
                           <a:solidFill>
                             <a:srgbClr val="222222"/>
                           </a:solidFill>
@@ -39254,7 +39665,7 @@
                         <a:t>12</a:t>
                       </a:r>
                       <a:r>
-                        <a:rPr lang="zh-CN" sz="1150" b="0" u="none" strike="noStrike">
+                        <a:rPr lang="zh-CN" sz="1150" b="0" u="none" strike="noStrike" dirty="0">
                           <a:solidFill>
                             <a:srgbClr val="222222"/>
                           </a:solidFill>
@@ -39266,7 +39677,7 @@
                         <a:t>월 → </a:t>
                       </a:r>
                       <a:r>
-                        <a:rPr lang="en-US" sz="1150" b="0" u="none" strike="noStrike">
+                        <a:rPr lang="en-US" sz="1150" b="0" u="none" strike="noStrike" dirty="0">
                           <a:solidFill>
                             <a:srgbClr val="222222"/>
                           </a:solidFill>
@@ -39277,7 +39688,7 @@
                         </a:rPr>
                         <a:t>ds, District, y</a:t>
                       </a:r>
-                      <a:endParaRPr lang="en-US" sz="1150" b="0" u="none" strike="noStrike">
+                      <a:endParaRPr lang="en-US" sz="1150" b="0" u="none" strike="noStrike" dirty="0">
                         <a:solidFill>
                           <a:srgbClr val="000000"/>
                         </a:solidFill>
@@ -40695,7 +41106,7 @@
                         </a:lnSpc>
                       </a:pPr>
                       <a:r>
-                        <a:rPr lang="zh-CN" sz="1150" b="1" u="none" strike="noStrike">
+                        <a:rPr lang="zh-CN" sz="1150" b="1" u="none" strike="noStrike" dirty="0">
                           <a:solidFill>
                             <a:srgbClr val="222222"/>
                           </a:solidFill>
@@ -40706,7 +41117,7 @@
                         </a:rPr>
                         <a:t>숫자 정리</a:t>
                       </a:r>
-                      <a:endParaRPr lang="en-US" sz="1150" b="0" u="none" strike="noStrike">
+                      <a:endParaRPr lang="en-US" sz="1150" b="0" u="none" strike="noStrike" dirty="0">
                         <a:solidFill>
                           <a:srgbClr val="000000"/>
                         </a:solidFill>
@@ -40879,7 +41290,7 @@
                         </a:lnSpc>
                       </a:pPr>
                       <a:r>
-                        <a:rPr lang="zh-CN" sz="1150" b="0" u="none" strike="noStrike">
+                        <a:rPr lang="zh-CN" sz="1150" b="0" u="none" strike="noStrike" dirty="0">
                           <a:solidFill>
                             <a:srgbClr val="222222"/>
                           </a:solidFill>
@@ -40891,7 +41302,7 @@
                         <a:t>콤마가 있으면 </a:t>
                       </a:r>
                       <a:r>
-                        <a:rPr lang="en-US" sz="1150" b="0" u="none" strike="noStrike">
+                        <a:rPr lang="en-US" sz="1150" b="0" u="none" strike="noStrike" dirty="0">
                           <a:solidFill>
                             <a:srgbClr val="222222"/>
                           </a:solidFill>
@@ -40903,7 +41314,7 @@
                         <a:t>1,000 </a:t>
                       </a:r>
                       <a:r>
-                        <a:rPr lang="zh-CN" sz="1150" b="0" u="none" strike="noStrike">
+                        <a:rPr lang="zh-CN" sz="1150" b="0" u="none" strike="noStrike" dirty="0">
                           <a:solidFill>
                             <a:srgbClr val="222222"/>
                           </a:solidFill>
@@ -40914,7 +41325,7 @@
                         </a:rPr>
                         <a:t>이상 값이 전부 결측</a:t>
                       </a:r>
-                      <a:endParaRPr lang="en-US" sz="1150" b="0" u="none" strike="noStrike">
+                      <a:endParaRPr lang="en-US" sz="1150" b="0" u="none" strike="noStrike" dirty="0">
                         <a:solidFill>
                           <a:srgbClr val="000000"/>
                         </a:solidFill>
@@ -40965,7 +41376,7 @@
                         </a:lnSpc>
                       </a:pPr>
                       <a:r>
-                        <a:rPr lang="en-US" sz="1150" b="0" u="none" strike="noStrike">
+                        <a:rPr lang="en-US" sz="1150" b="0" u="none" strike="noStrike" dirty="0">
                           <a:solidFill>
                             <a:srgbClr val="222222"/>
                           </a:solidFill>
@@ -40976,7 +41387,7 @@
                         </a:rPr>
                         <a:t>"1,234" → 1234</a:t>
                       </a:r>
-                      <a:endParaRPr lang="en-US" sz="1150" b="0" u="none" strike="noStrike">
+                      <a:endParaRPr lang="en-US" sz="1150" b="0" u="none" strike="noStrike" dirty="0">
                         <a:solidFill>
                           <a:srgbClr val="000000"/>
                         </a:solidFill>
@@ -42695,7 +43106,7 @@
                         </a:lnSpc>
                       </a:pPr>
                       <a:r>
-                        <a:rPr lang="en-US" sz="1100" b="0" u="none" strike="noStrike">
+                        <a:rPr lang="en-US" sz="1100" b="0" u="none" strike="noStrike" dirty="0">
                           <a:solidFill>
                             <a:srgbClr val="222222"/>
                           </a:solidFill>
@@ -42707,7 +43118,7 @@
                         <a:t>0</a:t>
                       </a:r>
                       <a:r>
-                        <a:rPr lang="zh-CN" sz="1100" b="0" u="none" strike="noStrike">
+                        <a:rPr lang="zh-CN" sz="1100" b="0" u="none" strike="noStrike" dirty="0">
                           <a:solidFill>
                             <a:srgbClr val="222222"/>
                           </a:solidFill>
@@ -42719,7 +43130,7 @@
                         <a:t>으로 바꾸고 </a:t>
                       </a:r>
                       <a:r>
-                        <a:rPr lang="en-US" sz="1100" b="0" u="none" strike="noStrike">
+                        <a:rPr lang="en-US" sz="1100" b="0" u="none" strike="noStrike" dirty="0" err="1">
                           <a:solidFill>
                             <a:srgbClr val="222222"/>
                           </a:solidFill>
@@ -42728,10 +43139,10 @@
                           <a:latin typeface="Pretendard"/>
                           <a:ea typeface="Pretendard"/>
                         </a:rPr>
-                        <a:t>imputed_zero </a:t>
-                      </a:r>
-                      <a:r>
-                        <a:rPr lang="zh-CN" sz="1100" b="0" u="none" strike="noStrike">
+                        <a:t>imputed_zero</a:t>
+                      </a:r>
+                      <a:r>
+                        <a:rPr lang="en-US" sz="1100" b="0" u="none" strike="noStrike" dirty="0">
                           <a:solidFill>
                             <a:srgbClr val="222222"/>
                           </a:solidFill>
@@ -42740,9 +43151,21 @@
                           <a:latin typeface="Pretendard"/>
                           <a:ea typeface="Pretendard"/>
                         </a:rPr>
+                        <a:t> </a:t>
+                      </a:r>
+                      <a:r>
+                        <a:rPr lang="zh-CN" sz="1100" b="0" u="none" strike="noStrike" dirty="0">
+                          <a:solidFill>
+                            <a:srgbClr val="222222"/>
+                          </a:solidFill>
+                          <a:effectLst/>
+                          <a:uFillTx/>
+                          <a:latin typeface="Pretendard"/>
+                          <a:ea typeface="Pretendard"/>
+                        </a:rPr>
                         <a:t>표시</a:t>
                       </a:r>
-                      <a:endParaRPr lang="en-US" sz="1100" b="0" u="none" strike="noStrike">
+                      <a:endParaRPr lang="en-US" sz="1100" b="0" u="none" strike="noStrike" dirty="0">
                         <a:solidFill>
                           <a:srgbClr val="000000"/>
                         </a:solidFill>
@@ -43070,7 +43493,7 @@
                         </a:lnSpc>
                       </a:pPr>
                       <a:r>
-                        <a:rPr lang="zh-CN" sz="1100" b="0" u="none" strike="noStrike">
+                        <a:rPr lang="zh-CN" sz="1100" b="0" u="none" strike="noStrike" dirty="0">
                           <a:solidFill>
                             <a:srgbClr val="222222"/>
                           </a:solidFill>
@@ -43082,7 +43505,7 @@
                         <a:t>빈 값 유지 </a:t>
                       </a:r>
                       <a:r>
-                        <a:rPr lang="en-US" sz="1100" b="0" u="none" strike="noStrike">
+                        <a:rPr lang="en-US" sz="1100" b="0" u="none" strike="noStrike" dirty="0">
                           <a:solidFill>
                             <a:srgbClr val="222222"/>
                           </a:solidFill>
@@ -43094,7 +43517,7 @@
                         <a:t>(50</a:t>
                       </a:r>
                       <a:r>
-                        <a:rPr lang="zh-CN" sz="1100" b="0" u="none" strike="noStrike">
+                        <a:rPr lang="zh-CN" sz="1100" b="0" u="none" strike="noStrike" dirty="0">
                           <a:solidFill>
                             <a:srgbClr val="222222"/>
                           </a:solidFill>
@@ -43106,7 +43529,7 @@
                         <a:t>칸</a:t>
                       </a:r>
                       <a:r>
-                        <a:rPr lang="en-US" sz="1100" b="0" u="none" strike="noStrike">
+                        <a:rPr lang="en-US" sz="1100" b="0" u="none" strike="noStrike" dirty="0">
                           <a:solidFill>
                             <a:srgbClr val="222222"/>
                           </a:solidFill>
@@ -43117,7 +43540,7 @@
                         </a:rPr>
                         <a:t>)</a:t>
                       </a:r>
-                      <a:endParaRPr lang="en-US" sz="1100" b="0" u="none" strike="noStrike">
+                      <a:endParaRPr lang="en-US" sz="1100" b="0" u="none" strike="noStrike" dirty="0">
                         <a:solidFill>
                           <a:srgbClr val="000000"/>
                         </a:solidFill>
@@ -43165,7 +43588,7 @@
                         </a:lnSpc>
                       </a:pPr>
                       <a:r>
-                        <a:rPr lang="zh-CN" sz="1100" b="0" u="none" strike="noStrike">
+                        <a:rPr lang="zh-CN" sz="1100" b="0" u="none" strike="noStrike" dirty="0">
                           <a:solidFill>
                             <a:srgbClr val="222222"/>
                           </a:solidFill>
@@ -43176,7 +43599,7 @@
                         </a:rPr>
                         <a:t>없는 값을 만들지 않음</a:t>
                       </a:r>
-                      <a:endParaRPr lang="en-US" sz="1100" b="0" u="none" strike="noStrike">
+                      <a:endParaRPr lang="en-US" sz="1100" b="0" u="none" strike="noStrike" dirty="0">
                         <a:solidFill>
                           <a:srgbClr val="000000"/>
                         </a:solidFill>
@@ -44343,7 +44766,7 @@
     <mc:Choice Requires="p14">
       <p:transition spd="slow" p14:dur="2000"/>
     </mc:Choice>
-    <mc:Fallback xmlns="" xmlns:p15="http://schemas.microsoft.com/office/powerpoint/2012/main">
+    <mc:Fallback xmlns:p15="http://schemas.microsoft.com/office/powerpoint/2012/main" xmlns="">
       <p:transition spd="slow"/>
     </mc:Fallback>
   </mc:AlternateContent>
